--- a/curriculum/M01/W08/L02/slides.pptx
+++ b/curriculum/M01/W08/L02/slides.pptx
@@ -10991,11 +10991,40 @@
                 <a:ea typeface="Malgun Gothic"/>
                 <a:cs typeface="Malgun Gothic"/>
               </a:rPr>
-              <a:t> 중증 질환의 원인 변이는 집단에서 드물다. gnomAD 같은 대규모 집단 자료에서 대립형질 빈도가 질환의 유병률보다 높으면 그 변이는 단독 원인이 아니다. 이 단계에서 변이의 90% 이상이 제외된다. 2. </a:t>
-            </a:r>
+              <a:t> 중증 질환의 원인 변이는 집단에서 드물다. gnomAD 같은 대규모 집단 자료에서 대립형질 빈도가 질환의 유병률보다 높으면 그 변이는 단독 원인이 아니다. 이 단계에서 변이의 90% 이상이 제외된다.</a:t>
+            </a:r>
+          </a:p>
+          <a:p>
+            <a:pPr>
+              <a:spcAft>
+                <a:spcPts val="900"/>
+              </a:spcAft>
+            </a:pPr>
             <a:r>
               <a:rPr sz="1400" b="1" i="0">
                 <a:solidFill>
+                  <a:srgbClr val="F2B705"/>
+                </a:solidFill>
+                <a:latin typeface="Malgun Gothic"/>
+                <a:ea typeface="Malgun Gothic"/>
+                <a:cs typeface="Malgun Gothic"/>
+              </a:rPr>
+              <a:t>•  </a:t>
+            </a:r>
+            <a:r>
+              <a:rPr sz="1400" b="0" i="0">
+                <a:solidFill>
+                  <a:srgbClr val="11202B"/>
+                </a:solidFill>
+                <a:latin typeface="Malgun Gothic"/>
+                <a:ea typeface="Malgun Gothic"/>
+                <a:cs typeface="Malgun Gothic"/>
+              </a:rPr>
+              <a:t>2. </a:t>
+            </a:r>
+            <a:r>
+              <a:rPr sz="1400" b="1" i="0">
+                <a:solidFill>
                   <a:srgbClr val="11202B"/>
                 </a:solidFill>
                 <a:latin typeface="Malgun Gothic"/>
@@ -11013,11 +11042,40 @@
                 <a:ea typeface="Malgun Gothic"/>
                 <a:cs typeface="Malgun Gothic"/>
               </a:rPr>
-              <a:t> 종결 codon 생성, frameshift, 정규 splice site 변이처럼 기능 상실이 예상되는 변이를 우선 본다. 다만 마지막 exon의 종결 변이는 NMD를 피하므로 결과가 다르고(M01-W07-L01), 읽기틀이 유지되는 결실은 경증이 될 수 있다(M01-W07-L03). 3. </a:t>
-            </a:r>
+              <a:t> 종결 codon 생성, frameshift, 정규 splice site 변이처럼 기능 상실이 예상되는 변이를 우선 본다. 다만 마지막 exon의 종결 변이는 NMD를 피하므로 결과가 다르고(M01-W07-L01), 읽기틀이 유지되는 결실은 경증이 될 수 있다(M01-W07-L03).</a:t>
+            </a:r>
+          </a:p>
+          <a:p>
+            <a:pPr>
+              <a:spcAft>
+                <a:spcPts val="900"/>
+              </a:spcAft>
+            </a:pPr>
             <a:r>
               <a:rPr sz="1400" b="1" i="0">
                 <a:solidFill>
+                  <a:srgbClr val="F2B705"/>
+                </a:solidFill>
+                <a:latin typeface="Malgun Gothic"/>
+                <a:ea typeface="Malgun Gothic"/>
+                <a:cs typeface="Malgun Gothic"/>
+              </a:rPr>
+              <a:t>•  </a:t>
+            </a:r>
+            <a:r>
+              <a:rPr sz="1400" b="0" i="0">
+                <a:solidFill>
+                  <a:srgbClr val="11202B"/>
+                </a:solidFill>
+                <a:latin typeface="Malgun Gothic"/>
+                <a:ea typeface="Malgun Gothic"/>
+                <a:cs typeface="Malgun Gothic"/>
+              </a:rPr>
+              <a:t>3. </a:t>
+            </a:r>
+            <a:r>
+              <a:rPr sz="1400" b="1" i="0">
+                <a:solidFill>
                   <a:srgbClr val="11202B"/>
                 </a:solidFill>
                 <a:latin typeface="Malgun Gothic"/>
@@ -11057,7 +11115,36 @@
                 <a:ea typeface="Malgun Gothic"/>
                 <a:cs typeface="Malgun Gothic"/>
               </a:rPr>
-              <a:t> 변이인지, 열성 질환에서 두 대립형질이 각각 부모에게서 온 것인지(trans 배치)를 확인한다. 같은 염색체에 함께 있으면(cis) 다른 한쪽은 정상이므로 원인이 아니다. 4. </a:t>
+              <a:t> 변이인지, 열성 질환에서 두 대립형질이 각각 부모에게서 온 것인지(trans 배치)를 확인한다. 같은 염색체에 함께 있으면(cis) 다른 한쪽은 정상이므로 원인이 아니다.</a:t>
+            </a:r>
+          </a:p>
+          <a:p>
+            <a:pPr>
+              <a:spcAft>
+                <a:spcPts val="900"/>
+              </a:spcAft>
+            </a:pPr>
+            <a:r>
+              <a:rPr sz="1400" b="1" i="0">
+                <a:solidFill>
+                  <a:srgbClr val="F2B705"/>
+                </a:solidFill>
+                <a:latin typeface="Malgun Gothic"/>
+                <a:ea typeface="Malgun Gothic"/>
+                <a:cs typeface="Malgun Gothic"/>
+              </a:rPr>
+              <a:t>•  </a:t>
+            </a:r>
+            <a:r>
+              <a:rPr sz="1400" b="0" i="0">
+                <a:solidFill>
+                  <a:srgbClr val="11202B"/>
+                </a:solidFill>
+                <a:latin typeface="Malgun Gothic"/>
+                <a:ea typeface="Malgun Gothic"/>
+                <a:cs typeface="Malgun Gothic"/>
+              </a:rPr>
+              <a:t>4. </a:t>
             </a:r>
             <a:r>
               <a:rPr sz="1400" b="1" i="0">
@@ -16644,7 +16731,94 @@
                 <a:ea typeface="Malgun Gothic"/>
                 <a:cs typeface="Malgun Gothic"/>
               </a:rPr>
-              <a:t>1. 단백질 혼합물을 trypsin으로 자른다. Trypsin은 lysine과 arginine의 carboxyl 쪽을 특이적으로 끊어 예측 가능한 peptide 집합을 만든다. 2. Peptide 혼합물을 액체 크로마토그래피로 분리해 질량분석기로 순차 주입한다. 3. 1차 질량분석으로 각 peptide의 m/z를 재고, 선택한 peptide를 충돌로 조각낸 뒤 2차 질량분석으로 조각들의 m/z를 잰다(tandem MS, MS/MS). 4. 조각 질량 양상을 유전체에서 예측한 peptide 목록과 맞추어 어느 단백질에서 온 peptide인지 동정한다.</a:t>
+              <a:t>1. 단백질 혼합물을 trypsin으로 자른다. Trypsin은 lysine과 arginine의 carboxyl 쪽을 특이적으로 끊어 예측 가능한 peptide 집합을 만든다.</a:t>
+            </a:r>
+          </a:p>
+          <a:p>
+            <a:pPr>
+              <a:spcAft>
+                <a:spcPts val="900"/>
+              </a:spcAft>
+            </a:pPr>
+            <a:r>
+              <a:rPr sz="1400" b="1" i="0">
+                <a:solidFill>
+                  <a:srgbClr val="F2B705"/>
+                </a:solidFill>
+                <a:latin typeface="Malgun Gothic"/>
+                <a:ea typeface="Malgun Gothic"/>
+                <a:cs typeface="Malgun Gothic"/>
+              </a:rPr>
+              <a:t>•  </a:t>
+            </a:r>
+            <a:r>
+              <a:rPr sz="1400" b="0" i="0">
+                <a:solidFill>
+                  <a:srgbClr val="11202B"/>
+                </a:solidFill>
+                <a:latin typeface="Malgun Gothic"/>
+                <a:ea typeface="Malgun Gothic"/>
+                <a:cs typeface="Malgun Gothic"/>
+              </a:rPr>
+              <a:t>2. Peptide 혼합물을 액체 크로마토그래피로 분리해 질량분석기로 순차 주입한다.</a:t>
+            </a:r>
+          </a:p>
+          <a:p>
+            <a:pPr>
+              <a:spcAft>
+                <a:spcPts val="900"/>
+              </a:spcAft>
+            </a:pPr>
+            <a:r>
+              <a:rPr sz="1400" b="1" i="0">
+                <a:solidFill>
+                  <a:srgbClr val="F2B705"/>
+                </a:solidFill>
+                <a:latin typeface="Malgun Gothic"/>
+                <a:ea typeface="Malgun Gothic"/>
+                <a:cs typeface="Malgun Gothic"/>
+              </a:rPr>
+              <a:t>•  </a:t>
+            </a:r>
+            <a:r>
+              <a:rPr sz="1400" b="0" i="0">
+                <a:solidFill>
+                  <a:srgbClr val="11202B"/>
+                </a:solidFill>
+                <a:latin typeface="Malgun Gothic"/>
+                <a:ea typeface="Malgun Gothic"/>
+                <a:cs typeface="Malgun Gothic"/>
+              </a:rPr>
+              <a:t>3. 1차 질량분석으로 각 peptide의 m/z를 재고, 선택한 peptide를 충돌로 조각낸 뒤 2차 질량분석으로 조각들의 m/z를 잰다(tandem MS, MS/MS).</a:t>
+            </a:r>
+          </a:p>
+          <a:p>
+            <a:pPr>
+              <a:spcAft>
+                <a:spcPts val="900"/>
+              </a:spcAft>
+            </a:pPr>
+            <a:r>
+              <a:rPr sz="1400" b="1" i="0">
+                <a:solidFill>
+                  <a:srgbClr val="F2B705"/>
+                </a:solidFill>
+                <a:latin typeface="Malgun Gothic"/>
+                <a:ea typeface="Malgun Gothic"/>
+                <a:cs typeface="Malgun Gothic"/>
+              </a:rPr>
+              <a:t>•  </a:t>
+            </a:r>
+            <a:r>
+              <a:rPr sz="1400" b="0" i="0">
+                <a:solidFill>
+                  <a:srgbClr val="11202B"/>
+                </a:solidFill>
+                <a:latin typeface="Malgun Gothic"/>
+                <a:ea typeface="Malgun Gothic"/>
+                <a:cs typeface="Malgun Gothic"/>
+              </a:rPr>
+              <a:t>4. 조각 질량 양상을 유전체에서 예측한 peptide 목록과 맞추어 어느 단백질에서 온 peptide인지 동정한다.</a:t>
             </a:r>
           </a:p>
           <a:p>

--- a/curriculum/M01/W08/L02/slides.pptx
+++ b/curriculum/M01/W08/L02/slides.pptx
@@ -15539,7 +15539,7 @@
                 <a:ea typeface="Malgun Gothic"/>
                 <a:cs typeface="Malgun Gothic"/>
               </a:rPr>
-              <a:t>M01-W05-L03 유전정보의 흐름 — central dogma, mRNA 가공, codon</a:t>
+              <a:t>M01-W05-L03 유전정보의 흐름: 복제·전사·번역 — central dogma, mRNA 가공, codon</a:t>
             </a:r>
           </a:p>
           <a:p>
